--- a/meetings/Week7.pptx
+++ b/meetings/Week7.pptx
@@ -3602,7 +3602,12 @@
             <p:ph type="title"/>
           </p:nvPr>
         </p:nvSpPr>
-        <p:spPr/>
+        <p:spPr>
+          <a:xfrm>
+            <a:off x="838200" y="314325"/>
+            <a:ext cx="10515600" cy="1325563"/>
+          </a:xfrm>
+        </p:spPr>
         <p:txBody>
           <a:bodyPr/>
           <a:lstStyle/>
@@ -3724,6 +3729,9 @@
             </a:r>
           </a:p>
           <a:p>
+            <a:endParaRPr lang="en-US" dirty="0"/>
+          </a:p>
+          <a:p>
             <a:r>
               <a:rPr lang="en-US" dirty="0"/>
               <a:t>Ax + </a:t>
@@ -3735,6 +3743,23 @@
             <a:r>
               <a:rPr lang="en-US" dirty="0"/>
               <a:t> * y</a:t>
+            </a:r>
+          </a:p>
+          <a:p>
+            <a:endParaRPr lang="en-US" dirty="0"/>
+          </a:p>
+          <a:p>
+            <a:r>
+              <a:rPr lang="en-US" dirty="0"/>
+              <a:t>Ax + (</a:t>
+            </a:r>
+            <a:r>
+              <a:rPr lang="en-US" dirty="0" err="1"/>
+              <a:t>b+y</a:t>
+            </a:r>
+            <a:r>
+              <a:rPr lang="en-US" dirty="0"/>
+              <a:t>)*y</a:t>
             </a:r>
           </a:p>
         </p:txBody>
@@ -3887,18 +3912,19 @@
             <p:ph type="title"/>
           </p:nvPr>
         </p:nvSpPr>
-        <p:spPr/>
+        <p:spPr>
+          <a:xfrm>
+            <a:off x="838200" y="314325"/>
+            <a:ext cx="10515600" cy="1325563"/>
+          </a:xfrm>
+        </p:spPr>
         <p:txBody>
           <a:bodyPr/>
           <a:lstStyle/>
           <a:p>
             <a:r>
               <a:rPr lang="en-US" dirty="0"/>
-              <a:t>Early stopping use validation loss or </a:t>
-            </a:r>
-            <a:r>
-              <a:rPr lang="en-US"/>
-              <a:t>training loss</a:t>
+              <a:t>Early stopping use validation loss or training loss</a:t>
             </a:r>
           </a:p>
         </p:txBody>
